--- a/docs/presentaciones/classes/clase-034-parquet-arrow-pyarrow-duckdb-presentacion.pptx
+++ b/docs/presentaciones/classes/clase-034-parquet-arrow-pyarrow-duckdb-presentacion.pptx
@@ -3272,7 +3272,7 @@
                 </a:solidFill>
                 <a:latin typeface="Segoe UI"/>
               </a:rPr>
-              <a:t>Parte: 0 — Prerrequisitos · Fuente: docs Apache Arrow + DuckDB + Wes McKinney blogs.  Duración estimada: 75 min.</a:t>
+              <a:t>Parte: 0 — Prerrequisitos · Fuente: docs Apache Arrow + DuckDB + Wes McKinney blogs.  Duración estimada: 75 min. · Nivel: Básico-Intermedio</a:t>
             </a:r>
           </a:p>
         </p:txBody>
@@ -3581,7 +3581,7 @@
                 </a:solidFill>
                 <a:latin typeface="Segoe UI"/>
               </a:rPr>
-              <a:t>Parte: 0 — Prerrequisitos · Fuente: docs Apache Arrow + DuckDB + Wes McKinney blogs.  Duración estimada: 75 min.</a:t>
+              <a:t>Parte: 0 — Prerrequisitos · Fuente: docs Apache Arrow + DuckDB + Wes McKinney blogs.  Duración estimada: 75 min. · Nivel: Básico-Intermedio</a:t>
             </a:r>
           </a:p>
         </p:txBody>
